--- a/topic-02/unit-2/talk-01/MQTT Security.pptx
+++ b/topic-02/unit-2/talk-01/MQTT Security.pptx
@@ -282,7 +282,7 @@
           <a:p>
             <a:fld id="{14970863-458D-49A3-B7A8-59462DAD1516}" type="datetimeFigureOut">
               <a:rPr lang="en-IE" smtClean="0"/>
-              <a:t>29/01/2025</a:t>
+              <a:t>22/02/2026</a:t>
             </a:fld>
             <a:endParaRPr lang="en-IE"/>
           </a:p>
@@ -482,7 +482,7 @@
           <a:p>
             <a:fld id="{14970863-458D-49A3-B7A8-59462DAD1516}" type="datetimeFigureOut">
               <a:rPr lang="en-IE" smtClean="0"/>
-              <a:t>29/01/2025</a:t>
+              <a:t>22/02/2026</a:t>
             </a:fld>
             <a:endParaRPr lang="en-IE"/>
           </a:p>
@@ -692,7 +692,7 @@
           <a:p>
             <a:fld id="{14970863-458D-49A3-B7A8-59462DAD1516}" type="datetimeFigureOut">
               <a:rPr lang="en-IE" smtClean="0"/>
-              <a:t>29/01/2025</a:t>
+              <a:t>22/02/2026</a:t>
             </a:fld>
             <a:endParaRPr lang="en-IE"/>
           </a:p>
@@ -892,7 +892,7 @@
           <a:p>
             <a:fld id="{14970863-458D-49A3-B7A8-59462DAD1516}" type="datetimeFigureOut">
               <a:rPr lang="en-IE" smtClean="0"/>
-              <a:t>29/01/2025</a:t>
+              <a:t>22/02/2026</a:t>
             </a:fld>
             <a:endParaRPr lang="en-IE"/>
           </a:p>
@@ -1168,7 +1168,7 @@
           <a:p>
             <a:fld id="{14970863-458D-49A3-B7A8-59462DAD1516}" type="datetimeFigureOut">
               <a:rPr lang="en-IE" smtClean="0"/>
-              <a:t>29/01/2025</a:t>
+              <a:t>22/02/2026</a:t>
             </a:fld>
             <a:endParaRPr lang="en-IE"/>
           </a:p>
@@ -1436,7 +1436,7 @@
           <a:p>
             <a:fld id="{14970863-458D-49A3-B7A8-59462DAD1516}" type="datetimeFigureOut">
               <a:rPr lang="en-IE" smtClean="0"/>
-              <a:t>29/01/2025</a:t>
+              <a:t>22/02/2026</a:t>
             </a:fld>
             <a:endParaRPr lang="en-IE"/>
           </a:p>
@@ -1851,7 +1851,7 @@
           <a:p>
             <a:fld id="{14970863-458D-49A3-B7A8-59462DAD1516}" type="datetimeFigureOut">
               <a:rPr lang="en-IE" smtClean="0"/>
-              <a:t>29/01/2025</a:t>
+              <a:t>22/02/2026</a:t>
             </a:fld>
             <a:endParaRPr lang="en-IE"/>
           </a:p>
@@ -1993,7 +1993,7 @@
           <a:p>
             <a:fld id="{14970863-458D-49A3-B7A8-59462DAD1516}" type="datetimeFigureOut">
               <a:rPr lang="en-IE" smtClean="0"/>
-              <a:t>29/01/2025</a:t>
+              <a:t>22/02/2026</a:t>
             </a:fld>
             <a:endParaRPr lang="en-IE"/>
           </a:p>
@@ -2106,7 +2106,7 @@
           <a:p>
             <a:fld id="{14970863-458D-49A3-B7A8-59462DAD1516}" type="datetimeFigureOut">
               <a:rPr lang="en-IE" smtClean="0"/>
-              <a:t>29/01/2025</a:t>
+              <a:t>22/02/2026</a:t>
             </a:fld>
             <a:endParaRPr lang="en-IE"/>
           </a:p>
@@ -2419,7 +2419,7 @@
           <a:p>
             <a:fld id="{14970863-458D-49A3-B7A8-59462DAD1516}" type="datetimeFigureOut">
               <a:rPr lang="en-IE" smtClean="0"/>
-              <a:t>29/01/2025</a:t>
+              <a:t>22/02/2026</a:t>
             </a:fld>
             <a:endParaRPr lang="en-IE"/>
           </a:p>
@@ -2708,7 +2708,7 @@
           <a:p>
             <a:fld id="{14970863-458D-49A3-B7A8-59462DAD1516}" type="datetimeFigureOut">
               <a:rPr lang="en-IE" smtClean="0"/>
-              <a:t>29/01/2025</a:t>
+              <a:t>22/02/2026</a:t>
             </a:fld>
             <a:endParaRPr lang="en-IE"/>
           </a:p>
@@ -2951,7 +2951,7 @@
           <a:p>
             <a:fld id="{14970863-458D-49A3-B7A8-59462DAD1516}" type="datetimeFigureOut">
               <a:rPr lang="en-IE" smtClean="0"/>
-              <a:t>29/01/2025</a:t>
+              <a:t>22/02/2026</a:t>
             </a:fld>
             <a:endParaRPr lang="en-IE"/>
           </a:p>
@@ -7493,6 +7493,36 @@
           </a:prstGeom>
         </p:spPr>
       </p:pic>
+      <p:pic>
+        <p:nvPicPr>
+          <p:cNvPr id="6" name="Picture 5" descr="A screen shot of a computer code">
+            <a:extLst>
+              <a:ext uri="{FF2B5EF4-FFF2-40B4-BE49-F238E27FC236}">
+                <a16:creationId xmlns:a16="http://schemas.microsoft.com/office/drawing/2014/main" id="{DB333BC1-0888-3907-534C-9A7BB24BE583}"/>
+              </a:ext>
+            </a:extLst>
+          </p:cNvPr>
+          <p:cNvPicPr>
+            <a:picLocks noChangeAspect="1"/>
+          </p:cNvPicPr>
+          <p:nvPr/>
+        </p:nvPicPr>
+        <p:blipFill>
+          <a:blip r:embed="rId3"/>
+          <a:stretch>
+            <a:fillRect/>
+          </a:stretch>
+        </p:blipFill>
+        <p:spPr>
+          <a:xfrm>
+            <a:off x="1240004" y="4345406"/>
+            <a:ext cx="4935221" cy="1455787"/>
+          </a:xfrm>
+          <a:prstGeom prst="rect">
+            <a:avLst/>
+          </a:prstGeom>
+        </p:spPr>
+      </p:pic>
     </p:spTree>
     <p:extLst>
       <p:ext uri="{BB962C8B-B14F-4D97-AF65-F5344CB8AC3E}">
